--- a/Img/HSSTT_figures/原始素材/problem.pptx
+++ b/Img/HSSTT_figures/原始素材/problem.pptx
@@ -220,7 +220,7 @@
           <a:p>
             <a:fld id="{DCFA0BA2-2A19-4449-999F-4326F67BD746}" type="datetimeFigureOut">
               <a:rPr lang="zh-CN" altLang="en-US" smtClean="0"/>
-              <a:t>2024/9/14</a:t>
+              <a:t>2026/4/8</a:t>
             </a:fld>
             <a:endParaRPr lang="zh-CN" altLang="en-US"/>
           </a:p>
@@ -634,7 +634,7 @@
           <a:p>
             <a:fld id="{482A127F-42BB-47B6-9DD0-63FB11CC49CC}" type="datetimeFigureOut">
               <a:rPr lang="zh-CN" altLang="en-US" smtClean="0"/>
-              <a:t>2024/9/14</a:t>
+              <a:t>2026/4/8</a:t>
             </a:fld>
             <a:endParaRPr lang="zh-CN" altLang="en-US"/>
           </a:p>
@@ -832,7 +832,7 @@
           <a:p>
             <a:fld id="{482A127F-42BB-47B6-9DD0-63FB11CC49CC}" type="datetimeFigureOut">
               <a:rPr lang="zh-CN" altLang="en-US" smtClean="0"/>
-              <a:t>2024/9/14</a:t>
+              <a:t>2026/4/8</a:t>
             </a:fld>
             <a:endParaRPr lang="zh-CN" altLang="en-US"/>
           </a:p>
@@ -1040,7 +1040,7 @@
           <a:p>
             <a:fld id="{482A127F-42BB-47B6-9DD0-63FB11CC49CC}" type="datetimeFigureOut">
               <a:rPr lang="zh-CN" altLang="en-US" smtClean="0"/>
-              <a:t>2024/9/14</a:t>
+              <a:t>2026/4/8</a:t>
             </a:fld>
             <a:endParaRPr lang="zh-CN" altLang="en-US"/>
           </a:p>
@@ -1238,7 +1238,7 @@
           <a:p>
             <a:fld id="{482A127F-42BB-47B6-9DD0-63FB11CC49CC}" type="datetimeFigureOut">
               <a:rPr lang="zh-CN" altLang="en-US" smtClean="0"/>
-              <a:t>2024/9/14</a:t>
+              <a:t>2026/4/8</a:t>
             </a:fld>
             <a:endParaRPr lang="zh-CN" altLang="en-US"/>
           </a:p>
@@ -1513,7 +1513,7 @@
           <a:p>
             <a:fld id="{482A127F-42BB-47B6-9DD0-63FB11CC49CC}" type="datetimeFigureOut">
               <a:rPr lang="zh-CN" altLang="en-US" smtClean="0"/>
-              <a:t>2024/9/14</a:t>
+              <a:t>2026/4/8</a:t>
             </a:fld>
             <a:endParaRPr lang="zh-CN" altLang="en-US"/>
           </a:p>
@@ -1778,7 +1778,7 @@
           <a:p>
             <a:fld id="{482A127F-42BB-47B6-9DD0-63FB11CC49CC}" type="datetimeFigureOut">
               <a:rPr lang="zh-CN" altLang="en-US" smtClean="0"/>
-              <a:t>2024/9/14</a:t>
+              <a:t>2026/4/8</a:t>
             </a:fld>
             <a:endParaRPr lang="zh-CN" altLang="en-US"/>
           </a:p>
@@ -2190,7 +2190,7 @@
           <a:p>
             <a:fld id="{482A127F-42BB-47B6-9DD0-63FB11CC49CC}" type="datetimeFigureOut">
               <a:rPr lang="zh-CN" altLang="en-US" smtClean="0"/>
-              <a:t>2024/9/14</a:t>
+              <a:t>2026/4/8</a:t>
             </a:fld>
             <a:endParaRPr lang="zh-CN" altLang="en-US"/>
           </a:p>
@@ -2331,7 +2331,7 @@
           <a:p>
             <a:fld id="{482A127F-42BB-47B6-9DD0-63FB11CC49CC}" type="datetimeFigureOut">
               <a:rPr lang="zh-CN" altLang="en-US" smtClean="0"/>
-              <a:t>2024/9/14</a:t>
+              <a:t>2026/4/8</a:t>
             </a:fld>
             <a:endParaRPr lang="zh-CN" altLang="en-US"/>
           </a:p>
@@ -2444,7 +2444,7 @@
           <a:p>
             <a:fld id="{482A127F-42BB-47B6-9DD0-63FB11CC49CC}" type="datetimeFigureOut">
               <a:rPr lang="zh-CN" altLang="en-US" smtClean="0"/>
-              <a:t>2024/9/14</a:t>
+              <a:t>2026/4/8</a:t>
             </a:fld>
             <a:endParaRPr lang="zh-CN" altLang="en-US"/>
           </a:p>
@@ -2755,7 +2755,7 @@
           <a:p>
             <a:fld id="{482A127F-42BB-47B6-9DD0-63FB11CC49CC}" type="datetimeFigureOut">
               <a:rPr lang="zh-CN" altLang="en-US" smtClean="0"/>
-              <a:t>2024/9/14</a:t>
+              <a:t>2026/4/8</a:t>
             </a:fld>
             <a:endParaRPr lang="zh-CN" altLang="en-US"/>
           </a:p>
@@ -3043,7 +3043,7 @@
           <a:p>
             <a:fld id="{482A127F-42BB-47B6-9DD0-63FB11CC49CC}" type="datetimeFigureOut">
               <a:rPr lang="zh-CN" altLang="en-US" smtClean="0"/>
-              <a:t>2024/9/14</a:t>
+              <a:t>2026/4/8</a:t>
             </a:fld>
             <a:endParaRPr lang="zh-CN" altLang="en-US"/>
           </a:p>
@@ -3284,7 +3284,7 @@
           <a:p>
             <a:fld id="{482A127F-42BB-47B6-9DD0-63FB11CC49CC}" type="datetimeFigureOut">
               <a:rPr lang="zh-CN" altLang="en-US" smtClean="0"/>
-              <a:t>2024/9/14</a:t>
+              <a:t>2026/4/8</a:t>
             </a:fld>
             <a:endParaRPr lang="zh-CN" altLang="en-US"/>
           </a:p>
@@ -3701,352 +3701,12 @@
           <a:chExt cx="0" cy="0"/>
         </a:xfrm>
       </p:grpSpPr>
-      <p:pic>
-        <p:nvPicPr>
-          <p:cNvPr id="71" name="图片 70">
-            <a:extLst>
-              <a:ext uri="{FF2B5EF4-FFF2-40B4-BE49-F238E27FC236}">
-                <a16:creationId xmlns:a16="http://schemas.microsoft.com/office/drawing/2014/main" id="{403775F3-FCD3-5330-8C6C-F83BF13EBC76}"/>
-              </a:ext>
-            </a:extLst>
-          </p:cNvPr>
-          <p:cNvPicPr>
-            <a:picLocks noChangeAspect="1"/>
-          </p:cNvPicPr>
-          <p:nvPr/>
-        </p:nvPicPr>
-        <p:blipFill>
-          <a:blip r:embed="rId2">
-            <a:extLst>
-              <a:ext uri="{28A0092B-C50C-407E-A947-70E740481C1C}">
-                <a14:useLocalDpi xmlns:a14="http://schemas.microsoft.com/office/drawing/2010/main" val="0"/>
-              </a:ext>
-            </a:extLst>
-          </a:blip>
-          <a:stretch>
-            <a:fillRect/>
-          </a:stretch>
-        </p:blipFill>
-        <p:spPr>
-          <a:xfrm>
-            <a:off x="2032000" y="985630"/>
-            <a:ext cx="2690165" cy="2170481"/>
-          </a:xfrm>
-          <a:prstGeom prst="rect">
-            <a:avLst/>
-          </a:prstGeom>
-        </p:spPr>
-      </p:pic>
-      <p:pic>
-        <p:nvPicPr>
-          <p:cNvPr id="72" name="图片 71">
-            <a:extLst>
-              <a:ext uri="{FF2B5EF4-FFF2-40B4-BE49-F238E27FC236}">
-                <a16:creationId xmlns:a16="http://schemas.microsoft.com/office/drawing/2014/main" id="{B5626D65-B8BD-4461-39B7-FB526928F45B}"/>
-              </a:ext>
-            </a:extLst>
-          </p:cNvPr>
-          <p:cNvPicPr>
-            <a:picLocks noChangeAspect="1"/>
-          </p:cNvPicPr>
-          <p:nvPr/>
-        </p:nvPicPr>
-        <p:blipFill>
-          <a:blip r:embed="rId3">
-            <a:extLst>
-              <a:ext uri="{28A0092B-C50C-407E-A947-70E740481C1C}">
-                <a14:useLocalDpi xmlns:a14="http://schemas.microsoft.com/office/drawing/2010/main" val="0"/>
-              </a:ext>
-            </a:extLst>
-          </a:blip>
-          <a:stretch>
-            <a:fillRect/>
-          </a:stretch>
-        </p:blipFill>
-        <p:spPr>
-          <a:xfrm>
-            <a:off x="4750919" y="985630"/>
-            <a:ext cx="2690165" cy="2170481"/>
-          </a:xfrm>
-          <a:prstGeom prst="rect">
-            <a:avLst/>
-          </a:prstGeom>
-        </p:spPr>
-      </p:pic>
-      <p:pic>
-        <p:nvPicPr>
-          <p:cNvPr id="73" name="图片 72">
-            <a:extLst>
-              <a:ext uri="{FF2B5EF4-FFF2-40B4-BE49-F238E27FC236}">
-                <a16:creationId xmlns:a16="http://schemas.microsoft.com/office/drawing/2014/main" id="{A98628B5-F0B6-B94E-D673-A5D7CBE4169A}"/>
-              </a:ext>
-            </a:extLst>
-          </p:cNvPr>
-          <p:cNvPicPr>
-            <a:picLocks noChangeAspect="1"/>
-          </p:cNvPicPr>
-          <p:nvPr/>
-        </p:nvPicPr>
-        <p:blipFill>
-          <a:blip r:embed="rId4">
-            <a:extLst>
-              <a:ext uri="{28A0092B-C50C-407E-A947-70E740481C1C}">
-                <a14:useLocalDpi xmlns:a14="http://schemas.microsoft.com/office/drawing/2010/main" val="0"/>
-              </a:ext>
-            </a:extLst>
-          </a:blip>
-          <a:stretch>
-            <a:fillRect/>
-          </a:stretch>
-        </p:blipFill>
-        <p:spPr>
-          <a:xfrm>
-            <a:off x="7469838" y="985629"/>
-            <a:ext cx="2690774" cy="2171396"/>
-          </a:xfrm>
-          <a:prstGeom prst="rect">
-            <a:avLst/>
-          </a:prstGeom>
-        </p:spPr>
-      </p:pic>
-      <p:sp>
-        <p:nvSpPr>
-          <p:cNvPr id="74" name="矩形: 圆角 73">
-            <a:extLst>
-              <a:ext uri="{FF2B5EF4-FFF2-40B4-BE49-F238E27FC236}">
-                <a16:creationId xmlns:a16="http://schemas.microsoft.com/office/drawing/2014/main" id="{EEA7C6FC-9BCC-10DB-4846-FB50F113FC59}"/>
-              </a:ext>
-            </a:extLst>
-          </p:cNvPr>
-          <p:cNvSpPr/>
-          <p:nvPr/>
-        </p:nvSpPr>
-        <p:spPr>
-          <a:xfrm>
-            <a:off x="2031694" y="555479"/>
-            <a:ext cx="2690165" cy="361950"/>
-          </a:xfrm>
-          <a:prstGeom prst="roundRect">
-            <a:avLst/>
-          </a:prstGeom>
-          <a:ln>
-            <a:solidFill>
-              <a:schemeClr val="bg1"/>
-            </a:solidFill>
-          </a:ln>
-        </p:spPr>
-        <p:style>
-          <a:lnRef idx="2">
-            <a:schemeClr val="dk1"/>
-          </a:lnRef>
-          <a:fillRef idx="1">
-            <a:schemeClr val="lt1"/>
-          </a:fillRef>
-          <a:effectRef idx="0">
-            <a:schemeClr val="dk1"/>
-          </a:effectRef>
-          <a:fontRef idx="minor">
-            <a:schemeClr val="dk1"/>
-          </a:fontRef>
-        </p:style>
-        <p:txBody>
-          <a:bodyPr rtlCol="0" anchor="ctr"/>
-          <a:lstStyle/>
-          <a:p>
-            <a:pPr algn="ctr"/>
-            <a:r>
-              <a:rPr lang="en-US" altLang="zh-CN" sz="1799" dirty="0">
-                <a:latin typeface="Times New Roman" panose="02020603050405020304" pitchFamily="18" charset="0"/>
-                <a:cs typeface="Times New Roman" panose="02020603050405020304" pitchFamily="18" charset="0"/>
-              </a:rPr>
-              <a:t>Blind</a:t>
-            </a:r>
-            <a:endParaRPr lang="zh-CN" altLang="en-US" sz="1799" dirty="0">
-              <a:latin typeface="Times New Roman" panose="02020603050405020304" pitchFamily="18" charset="0"/>
-              <a:cs typeface="Times New Roman" panose="02020603050405020304" pitchFamily="18" charset="0"/>
-            </a:endParaRPr>
-          </a:p>
-        </p:txBody>
-      </p:sp>
-      <p:sp>
-        <p:nvSpPr>
-          <p:cNvPr id="75" name="矩形: 圆角 74">
-            <a:extLst>
-              <a:ext uri="{FF2B5EF4-FFF2-40B4-BE49-F238E27FC236}">
-                <a16:creationId xmlns:a16="http://schemas.microsoft.com/office/drawing/2014/main" id="{A93DC2A5-6A36-A712-D950-9287398C87C7}"/>
-              </a:ext>
-            </a:extLst>
-          </p:cNvPr>
-          <p:cNvSpPr/>
-          <p:nvPr/>
-        </p:nvSpPr>
-        <p:spPr>
-          <a:xfrm>
-            <a:off x="4750918" y="555479"/>
-            <a:ext cx="2690165" cy="361950"/>
-          </a:xfrm>
-          <a:prstGeom prst="roundRect">
-            <a:avLst/>
-          </a:prstGeom>
-          <a:ln>
-            <a:solidFill>
-              <a:schemeClr val="bg1"/>
-            </a:solidFill>
-          </a:ln>
-        </p:spPr>
-        <p:style>
-          <a:lnRef idx="2">
-            <a:schemeClr val="dk1"/>
-          </a:lnRef>
-          <a:fillRef idx="1">
-            <a:schemeClr val="lt1"/>
-          </a:fillRef>
-          <a:effectRef idx="0">
-            <a:schemeClr val="dk1"/>
-          </a:effectRef>
-          <a:fontRef idx="minor">
-            <a:schemeClr val="dk1"/>
-          </a:fontRef>
-        </p:style>
-        <p:txBody>
-          <a:bodyPr rtlCol="0" anchor="ctr"/>
-          <a:lstStyle/>
-          <a:p>
-            <a:pPr algn="ctr"/>
-            <a:r>
-              <a:rPr lang="en-US" altLang="zh-CN" sz="1799" dirty="0" err="1">
-                <a:latin typeface="Times New Roman" panose="02020603050405020304" pitchFamily="18" charset="0"/>
-                <a:cs typeface="Times New Roman" panose="02020603050405020304" pitchFamily="18" charset="0"/>
-              </a:rPr>
-              <a:t>Miscalibrated</a:t>
-            </a:r>
-            <a:endParaRPr lang="zh-CN" altLang="en-US" sz="1799" dirty="0">
-              <a:latin typeface="Times New Roman" panose="02020603050405020304" pitchFamily="18" charset="0"/>
-              <a:cs typeface="Times New Roman" panose="02020603050405020304" pitchFamily="18" charset="0"/>
-            </a:endParaRPr>
-          </a:p>
-        </p:txBody>
-      </p:sp>
-      <p:sp>
-        <p:nvSpPr>
-          <p:cNvPr id="76" name="矩形: 圆角 75">
-            <a:extLst>
-              <a:ext uri="{FF2B5EF4-FFF2-40B4-BE49-F238E27FC236}">
-                <a16:creationId xmlns:a16="http://schemas.microsoft.com/office/drawing/2014/main" id="{2C4E04AB-4998-C523-46DC-04C8945504C0}"/>
-              </a:ext>
-            </a:extLst>
-          </p:cNvPr>
-          <p:cNvSpPr/>
-          <p:nvPr/>
-        </p:nvSpPr>
-        <p:spPr>
-          <a:xfrm>
-            <a:off x="7470141" y="555479"/>
-            <a:ext cx="2690165" cy="361950"/>
-          </a:xfrm>
-          <a:prstGeom prst="roundRect">
-            <a:avLst/>
-          </a:prstGeom>
-          <a:ln>
-            <a:solidFill>
-              <a:schemeClr val="bg1"/>
-            </a:solidFill>
-          </a:ln>
-        </p:spPr>
-        <p:style>
-          <a:lnRef idx="2">
-            <a:schemeClr val="dk1"/>
-          </a:lnRef>
-          <a:fillRef idx="1">
-            <a:schemeClr val="lt1"/>
-          </a:fillRef>
-          <a:effectRef idx="0">
-            <a:schemeClr val="dk1"/>
-          </a:effectRef>
-          <a:fontRef idx="minor">
-            <a:schemeClr val="dk1"/>
-          </a:fontRef>
-        </p:style>
-        <p:txBody>
-          <a:bodyPr rtlCol="0" anchor="ctr"/>
-          <a:lstStyle/>
-          <a:p>
-            <a:pPr algn="ctr"/>
-            <a:r>
-              <a:rPr lang="en-US" altLang="zh-CN" sz="1799" dirty="0">
-                <a:latin typeface="Times New Roman" panose="02020603050405020304" pitchFamily="18" charset="0"/>
-                <a:cs typeface="Times New Roman" panose="02020603050405020304" pitchFamily="18" charset="0"/>
-              </a:rPr>
-              <a:t>Trustworthy</a:t>
-            </a:r>
-            <a:endParaRPr lang="zh-CN" altLang="en-US" sz="1799" dirty="0">
-              <a:latin typeface="Times New Roman" panose="02020603050405020304" pitchFamily="18" charset="0"/>
-              <a:cs typeface="Times New Roman" panose="02020603050405020304" pitchFamily="18" charset="0"/>
-            </a:endParaRPr>
-          </a:p>
-        </p:txBody>
-      </p:sp>
-      <p:sp>
-        <p:nvSpPr>
-          <p:cNvPr id="77" name="矩形: 圆角 76">
-            <a:extLst>
-              <a:ext uri="{FF2B5EF4-FFF2-40B4-BE49-F238E27FC236}">
-                <a16:creationId xmlns:a16="http://schemas.microsoft.com/office/drawing/2014/main" id="{A20F148F-CB99-1C56-723C-3D9DA4685932}"/>
-              </a:ext>
-            </a:extLst>
-          </p:cNvPr>
-          <p:cNvSpPr/>
-          <p:nvPr/>
-        </p:nvSpPr>
-        <p:spPr>
-          <a:xfrm>
-            <a:off x="3368394" y="3494427"/>
-            <a:ext cx="2576282" cy="361951"/>
-          </a:xfrm>
-          <a:prstGeom prst="roundRect">
-            <a:avLst/>
-          </a:prstGeom>
-          <a:ln>
-            <a:solidFill>
-              <a:schemeClr val="bg1"/>
-            </a:solidFill>
-          </a:ln>
-        </p:spPr>
-        <p:style>
-          <a:lnRef idx="2">
-            <a:schemeClr val="dk1"/>
-          </a:lnRef>
-          <a:fillRef idx="1">
-            <a:schemeClr val="lt1"/>
-          </a:fillRef>
-          <a:effectRef idx="0">
-            <a:schemeClr val="dk1"/>
-          </a:effectRef>
-          <a:fontRef idx="minor">
-            <a:schemeClr val="dk1"/>
-          </a:fontRef>
-        </p:style>
-        <p:txBody>
-          <a:bodyPr rtlCol="0" anchor="ctr"/>
-          <a:lstStyle/>
-          <a:p>
-            <a:pPr algn="ctr"/>
-            <a:r>
-              <a:rPr lang="en-US" altLang="zh-CN" dirty="0">
-                <a:latin typeface="Times New Roman" panose="02020603050405020304" pitchFamily="18" charset="0"/>
-                <a:cs typeface="Times New Roman" panose="02020603050405020304" pitchFamily="18" charset="0"/>
-              </a:rPr>
-              <a:t>uncertainty quantification</a:t>
-            </a:r>
-          </a:p>
-        </p:txBody>
-      </p:sp>
       <p:grpSp>
         <p:nvGrpSpPr>
-          <p:cNvPr id="78" name="组合 77">
-            <a:extLst>
-              <a:ext uri="{FF2B5EF4-FFF2-40B4-BE49-F238E27FC236}">
-                <a16:creationId xmlns:a16="http://schemas.microsoft.com/office/drawing/2014/main" id="{75FD147A-7DE1-CB94-014A-96E386F71D52}"/>
+          <p:cNvPr id="5" name="组合 4">
+            <a:extLst>
+              <a:ext uri="{FF2B5EF4-FFF2-40B4-BE49-F238E27FC236}">
+                <a16:creationId xmlns:a16="http://schemas.microsoft.com/office/drawing/2014/main" id="{517DCA15-88A8-A38A-6448-8B674A831456}"/>
               </a:ext>
             </a:extLst>
           </p:cNvPr>
@@ -4055,18 +3715,74 @@
         </p:nvGrpSpPr>
         <p:grpSpPr>
           <a:xfrm>
-            <a:off x="3936207" y="3209925"/>
-            <a:ext cx="1440656" cy="219076"/>
-            <a:chOff x="3936206" y="3209924"/>
-            <a:chExt cx="1440657" cy="219076"/>
+            <a:off x="1848886" y="555479"/>
+            <a:ext cx="8128918" cy="3921780"/>
+            <a:chOff x="1848886" y="555479"/>
+            <a:chExt cx="8128918" cy="3921780"/>
           </a:xfrm>
         </p:grpSpPr>
+        <p:sp>
+          <p:nvSpPr>
+            <p:cNvPr id="95" name="矩形: 圆角 94">
+              <a:extLst>
+                <a:ext uri="{FF2B5EF4-FFF2-40B4-BE49-F238E27FC236}">
+                  <a16:creationId xmlns:a16="http://schemas.microsoft.com/office/drawing/2014/main" id="{6841919D-1644-1A13-DF46-E50183154D5D}"/>
+                </a:ext>
+              </a:extLst>
+            </p:cNvPr>
+            <p:cNvSpPr/>
+            <p:nvPr/>
+          </p:nvSpPr>
+          <p:spPr>
+            <a:xfrm>
+              <a:off x="3573345" y="4115308"/>
+              <a:ext cx="4680000" cy="361951"/>
+            </a:xfrm>
+            <a:prstGeom prst="roundRect">
+              <a:avLst/>
+            </a:prstGeom>
+            <a:ln>
+              <a:solidFill>
+                <a:schemeClr val="bg1"/>
+              </a:solidFill>
+            </a:ln>
+          </p:spPr>
+          <p:style>
+            <a:lnRef idx="2">
+              <a:schemeClr val="dk1"/>
+            </a:lnRef>
+            <a:fillRef idx="1">
+              <a:schemeClr val="lt1"/>
+            </a:fillRef>
+            <a:effectRef idx="0">
+              <a:schemeClr val="dk1"/>
+            </a:effectRef>
+            <a:fontRef idx="minor">
+              <a:schemeClr val="dk1"/>
+            </a:fontRef>
+          </p:style>
+          <p:txBody>
+            <a:bodyPr rtlCol="0" anchor="ctr"/>
+            <a:lstStyle/>
+            <a:p>
+              <a:pPr algn="ctr"/>
+              <a:r>
+                <a:rPr lang="zh-CN" altLang="en-US" b="1" dirty="0">
+                  <a:latin typeface="宋体" panose="02010600030101010101" pitchFamily="2" charset="-122"/>
+                  <a:ea typeface="宋体" panose="02010600030101010101" pitchFamily="2" charset="-122"/>
+                  <a:cs typeface="Times New Roman" panose="02020603050405020304" pitchFamily="18" charset="0"/>
+                </a:rPr>
+                <a:t>不确定性驱动的时空退化依赖建模</a:t>
+              </a:r>
+            </a:p>
+          </p:txBody>
+        </p:sp>
         <p:grpSp>
           <p:nvGrpSpPr>
-            <p:cNvPr id="79" name="组合 78">
+            <p:cNvPr id="4" name="组合 3">
               <a:extLst>
                 <a:ext uri="{FF2B5EF4-FFF2-40B4-BE49-F238E27FC236}">
-                  <a16:creationId xmlns:a16="http://schemas.microsoft.com/office/drawing/2014/main" id="{F7596B0C-AF72-7DCC-2C3B-4F713DC63764}"/>
+                  <a16:creationId xmlns:a16="http://schemas.microsoft.com/office/drawing/2014/main" id="{A5F6E60C-E241-7486-0C07-324A25235402}"/>
                 </a:ext>
               </a:extLst>
             </p:cNvPr>
@@ -4075,768 +3791,1094 @@
           </p:nvGrpSpPr>
           <p:grpSpPr>
             <a:xfrm>
-              <a:off x="3936206" y="3209925"/>
-              <a:ext cx="1440657" cy="219075"/>
-              <a:chOff x="3936206" y="3209925"/>
-              <a:chExt cx="1440657" cy="219075"/>
+              <a:off x="1848886" y="555479"/>
+              <a:ext cx="8128918" cy="3452649"/>
+              <a:chOff x="2031694" y="555479"/>
+              <a:chExt cx="8128918" cy="3452649"/>
             </a:xfrm>
           </p:grpSpPr>
-          <p:cxnSp>
-            <p:nvCxnSpPr>
-              <p:cNvPr id="81" name="直接连接符 80">
+          <p:pic>
+            <p:nvPicPr>
+              <p:cNvPr id="71" name="图片 70">
                 <a:extLst>
                   <a:ext uri="{FF2B5EF4-FFF2-40B4-BE49-F238E27FC236}">
-                    <a16:creationId xmlns:a16="http://schemas.microsoft.com/office/drawing/2014/main" id="{8E789C5D-55D1-5E38-82D3-C2FA010DC99D}"/>
+                    <a16:creationId xmlns:a16="http://schemas.microsoft.com/office/drawing/2014/main" id="{403775F3-FCD3-5330-8C6C-F83BF13EBC76}"/>
                   </a:ext>
                 </a:extLst>
               </p:cNvPr>
-              <p:cNvCxnSpPr/>
+              <p:cNvPicPr>
+                <a:picLocks noChangeAspect="1"/>
+              </p:cNvPicPr>
               <p:nvPr/>
-            </p:nvCxnSpPr>
+            </p:nvPicPr>
+            <p:blipFill>
+              <a:blip r:embed="rId2">
+                <a:extLst>
+                  <a:ext uri="{28A0092B-C50C-407E-A947-70E740481C1C}">
+                    <a14:useLocalDpi xmlns:a14="http://schemas.microsoft.com/office/drawing/2010/main" val="0"/>
+                  </a:ext>
+                </a:extLst>
+              </a:blip>
+              <a:stretch>
+                <a:fillRect/>
+              </a:stretch>
+            </p:blipFill>
             <p:spPr>
               <a:xfrm>
-                <a:off x="3936206" y="3209925"/>
-                <a:ext cx="0" cy="219075"/>
+                <a:off x="2032000" y="985630"/>
+                <a:ext cx="2690165" cy="2170481"/>
               </a:xfrm>
-              <a:prstGeom prst="line">
+              <a:prstGeom prst="rect">
                 <a:avLst/>
               </a:prstGeom>
-              <a:ln w="25400">
-                <a:solidFill>
-                  <a:schemeClr val="tx1"/>
-                </a:solidFill>
-                <a:headEnd w="med" len="lg"/>
-                <a:tailEnd w="med" len="lg"/>
-              </a:ln>
             </p:spPr>
-            <p:style>
-              <a:lnRef idx="1">
-                <a:schemeClr val="accent1"/>
-              </a:lnRef>
-              <a:fillRef idx="0">
-                <a:schemeClr val="accent1"/>
-              </a:fillRef>
-              <a:effectRef idx="0">
-                <a:schemeClr val="accent1"/>
-              </a:effectRef>
-              <a:fontRef idx="minor">
-                <a:schemeClr val="tx1"/>
-              </a:fontRef>
-            </p:style>
-          </p:cxnSp>
-          <p:cxnSp>
-            <p:nvCxnSpPr>
-              <p:cNvPr id="82" name="直接连接符 81">
+          </p:pic>
+          <p:pic>
+            <p:nvPicPr>
+              <p:cNvPr id="72" name="图片 71">
                 <a:extLst>
                   <a:ext uri="{FF2B5EF4-FFF2-40B4-BE49-F238E27FC236}">
-                    <a16:creationId xmlns:a16="http://schemas.microsoft.com/office/drawing/2014/main" id="{93724F56-673F-C571-0D26-5174BE7A7161}"/>
+                    <a16:creationId xmlns:a16="http://schemas.microsoft.com/office/drawing/2014/main" id="{B5626D65-B8BD-4461-39B7-FB526928F45B}"/>
                   </a:ext>
                 </a:extLst>
               </p:cNvPr>
-              <p:cNvCxnSpPr>
-                <a:cxnSpLocks/>
-              </p:cNvCxnSpPr>
+              <p:cNvPicPr>
+                <a:picLocks noChangeAspect="1"/>
+              </p:cNvPicPr>
               <p:nvPr/>
-            </p:nvCxnSpPr>
+            </p:nvPicPr>
+            <p:blipFill>
+              <a:blip r:embed="rId3">
+                <a:extLst>
+                  <a:ext uri="{28A0092B-C50C-407E-A947-70E740481C1C}">
+                    <a14:useLocalDpi xmlns:a14="http://schemas.microsoft.com/office/drawing/2010/main" val="0"/>
+                  </a:ext>
+                </a:extLst>
+              </a:blip>
+              <a:stretch>
+                <a:fillRect/>
+              </a:stretch>
+            </p:blipFill>
             <p:spPr>
               <a:xfrm>
-                <a:off x="3936206" y="3429000"/>
-                <a:ext cx="1440657" cy="0"/>
+                <a:off x="4750919" y="985630"/>
+                <a:ext cx="2690165" cy="2170481"/>
               </a:xfrm>
-              <a:prstGeom prst="line">
+              <a:prstGeom prst="rect">
                 <a:avLst/>
               </a:prstGeom>
-              <a:ln w="25400">
-                <a:solidFill>
-                  <a:schemeClr val="tx1"/>
-                </a:solidFill>
-                <a:headEnd w="med" len="lg"/>
-                <a:tailEnd w="med" len="lg"/>
-              </a:ln>
             </p:spPr>
-            <p:style>
-              <a:lnRef idx="1">
-                <a:schemeClr val="accent1"/>
-              </a:lnRef>
-              <a:fillRef idx="0">
-                <a:schemeClr val="accent1"/>
-              </a:fillRef>
-              <a:effectRef idx="0">
-                <a:schemeClr val="accent1"/>
-              </a:effectRef>
-              <a:fontRef idx="minor">
-                <a:schemeClr val="tx1"/>
-              </a:fontRef>
-            </p:style>
-          </p:cxnSp>
-        </p:grpSp>
-        <p:cxnSp>
-          <p:nvCxnSpPr>
-            <p:cNvPr id="80" name="直接箭头连接符 79">
-              <a:extLst>
-                <a:ext uri="{FF2B5EF4-FFF2-40B4-BE49-F238E27FC236}">
-                  <a16:creationId xmlns:a16="http://schemas.microsoft.com/office/drawing/2014/main" id="{ACEEE113-3216-92C1-7BA1-BEED6A22B337}"/>
-                </a:ext>
-              </a:extLst>
-            </p:cNvPr>
-            <p:cNvCxnSpPr/>
-            <p:nvPr/>
-          </p:nvCxnSpPr>
-          <p:spPr>
-            <a:xfrm flipV="1">
-              <a:off x="5376863" y="3209924"/>
-              <a:ext cx="0" cy="219075"/>
-            </a:xfrm>
-            <a:prstGeom prst="straightConnector1">
-              <a:avLst/>
-            </a:prstGeom>
-            <a:ln w="25400">
-              <a:solidFill>
-                <a:schemeClr val="tx1"/>
-              </a:solidFill>
-              <a:headEnd w="med" len="lg"/>
-              <a:tailEnd type="stealth" w="med" len="lg"/>
-            </a:ln>
-          </p:spPr>
-          <p:style>
-            <a:lnRef idx="1">
-              <a:schemeClr val="accent1"/>
-            </a:lnRef>
-            <a:fillRef idx="0">
-              <a:schemeClr val="accent1"/>
-            </a:fillRef>
-            <a:effectRef idx="0">
-              <a:schemeClr val="accent1"/>
-            </a:effectRef>
-            <a:fontRef idx="minor">
-              <a:schemeClr val="tx1"/>
-            </a:fontRef>
-          </p:style>
-        </p:cxnSp>
-      </p:grpSp>
-      <p:grpSp>
-        <p:nvGrpSpPr>
-          <p:cNvPr id="83" name="组合 82">
-            <a:extLst>
-              <a:ext uri="{FF2B5EF4-FFF2-40B4-BE49-F238E27FC236}">
-                <a16:creationId xmlns:a16="http://schemas.microsoft.com/office/drawing/2014/main" id="{7FDFFD86-429B-9F39-CBBE-7830E32819EB}"/>
-              </a:ext>
-            </a:extLst>
-          </p:cNvPr>
-          <p:cNvGrpSpPr/>
-          <p:nvPr/>
-        </p:nvGrpSpPr>
-        <p:grpSpPr>
-          <a:xfrm>
-            <a:off x="6819901" y="3226109"/>
-            <a:ext cx="1440656" cy="219076"/>
-            <a:chOff x="3936206" y="3209924"/>
-            <a:chExt cx="1440657" cy="219076"/>
-          </a:xfrm>
-        </p:grpSpPr>
-        <p:grpSp>
-          <p:nvGrpSpPr>
-            <p:cNvPr id="84" name="组合 83">
-              <a:extLst>
-                <a:ext uri="{FF2B5EF4-FFF2-40B4-BE49-F238E27FC236}">
-                  <a16:creationId xmlns:a16="http://schemas.microsoft.com/office/drawing/2014/main" id="{E8691973-0582-DD63-90BA-81B6DA559F50}"/>
-                </a:ext>
-              </a:extLst>
-            </p:cNvPr>
-            <p:cNvGrpSpPr/>
-            <p:nvPr/>
-          </p:nvGrpSpPr>
-          <p:grpSpPr>
-            <a:xfrm>
-              <a:off x="3936206" y="3209925"/>
-              <a:ext cx="1440657" cy="219075"/>
-              <a:chOff x="3936206" y="3209925"/>
-              <a:chExt cx="1440657" cy="219075"/>
-            </a:xfrm>
-          </p:grpSpPr>
-          <p:cxnSp>
-            <p:nvCxnSpPr>
-              <p:cNvPr id="86" name="直接连接符 85">
+          </p:pic>
+          <p:pic>
+            <p:nvPicPr>
+              <p:cNvPr id="73" name="图片 72">
                 <a:extLst>
                   <a:ext uri="{FF2B5EF4-FFF2-40B4-BE49-F238E27FC236}">
-                    <a16:creationId xmlns:a16="http://schemas.microsoft.com/office/drawing/2014/main" id="{6F0D3EEB-A815-B44B-B6AB-5E853AFC969F}"/>
+                    <a16:creationId xmlns:a16="http://schemas.microsoft.com/office/drawing/2014/main" id="{A98628B5-F0B6-B94E-D673-A5D7CBE4169A}"/>
                   </a:ext>
                 </a:extLst>
               </p:cNvPr>
-              <p:cNvCxnSpPr/>
+              <p:cNvPicPr>
+                <a:picLocks noChangeAspect="1"/>
+              </p:cNvPicPr>
               <p:nvPr/>
-            </p:nvCxnSpPr>
+            </p:nvPicPr>
+            <p:blipFill>
+              <a:blip r:embed="rId4">
+                <a:extLst>
+                  <a:ext uri="{28A0092B-C50C-407E-A947-70E740481C1C}">
+                    <a14:useLocalDpi xmlns:a14="http://schemas.microsoft.com/office/drawing/2010/main" val="0"/>
+                  </a:ext>
+                </a:extLst>
+              </a:blip>
+              <a:stretch>
+                <a:fillRect/>
+              </a:stretch>
+            </p:blipFill>
             <p:spPr>
               <a:xfrm>
-                <a:off x="3936206" y="3209925"/>
-                <a:ext cx="0" cy="219075"/>
+                <a:off x="7469838" y="985629"/>
+                <a:ext cx="2690774" cy="2171396"/>
               </a:xfrm>
-              <a:prstGeom prst="line">
+              <a:prstGeom prst="rect">
                 <a:avLst/>
               </a:prstGeom>
-              <a:ln w="25400">
-                <a:solidFill>
-                  <a:schemeClr val="tx1"/>
-                </a:solidFill>
-                <a:headEnd w="med" len="lg"/>
-                <a:tailEnd w="med" len="lg"/>
-              </a:ln>
             </p:spPr>
-            <p:style>
-              <a:lnRef idx="1">
-                <a:schemeClr val="accent1"/>
-              </a:lnRef>
-              <a:fillRef idx="0">
-                <a:schemeClr val="accent1"/>
-              </a:fillRef>
-              <a:effectRef idx="0">
-                <a:schemeClr val="accent1"/>
-              </a:effectRef>
-              <a:fontRef idx="minor">
-                <a:schemeClr val="tx1"/>
-              </a:fontRef>
-            </p:style>
-          </p:cxnSp>
-          <p:cxnSp>
-            <p:nvCxnSpPr>
-              <p:cNvPr id="87" name="直接连接符 86">
+          </p:pic>
+          <p:sp>
+            <p:nvSpPr>
+              <p:cNvPr id="74" name="矩形: 圆角 73">
                 <a:extLst>
                   <a:ext uri="{FF2B5EF4-FFF2-40B4-BE49-F238E27FC236}">
-                    <a16:creationId xmlns:a16="http://schemas.microsoft.com/office/drawing/2014/main" id="{28513ED4-07CE-9933-FAFC-3B12B78FDEB1}"/>
+                    <a16:creationId xmlns:a16="http://schemas.microsoft.com/office/drawing/2014/main" id="{EEA7C6FC-9BCC-10DB-4846-FB50F113FC59}"/>
                   </a:ext>
                 </a:extLst>
               </p:cNvPr>
-              <p:cNvCxnSpPr>
-                <a:cxnSpLocks/>
-              </p:cNvCxnSpPr>
+              <p:cNvSpPr/>
               <p:nvPr/>
-            </p:nvCxnSpPr>
+            </p:nvSpPr>
             <p:spPr>
               <a:xfrm>
-                <a:off x="3936206" y="3429000"/>
-                <a:ext cx="1440657" cy="0"/>
+                <a:off x="2031694" y="555479"/>
+                <a:ext cx="2690165" cy="361950"/>
               </a:xfrm>
-              <a:prstGeom prst="line">
+              <a:prstGeom prst="roundRect">
                 <a:avLst/>
               </a:prstGeom>
-              <a:ln w="25400">
+              <a:ln>
                 <a:solidFill>
-                  <a:schemeClr val="tx1"/>
-                </a:solidFill>
-                <a:headEnd w="med" len="lg"/>
-                <a:tailEnd w="med" len="lg"/>
-              </a:ln>
-            </p:spPr>
-            <p:style>
-              <a:lnRef idx="1">
-                <a:schemeClr val="accent1"/>
-              </a:lnRef>
-              <a:fillRef idx="0">
-                <a:schemeClr val="accent1"/>
-              </a:fillRef>
-              <a:effectRef idx="0">
-                <a:schemeClr val="accent1"/>
-              </a:effectRef>
-              <a:fontRef idx="minor">
-                <a:schemeClr val="tx1"/>
-              </a:fontRef>
-            </p:style>
-          </p:cxnSp>
-        </p:grpSp>
-        <p:cxnSp>
-          <p:nvCxnSpPr>
-            <p:cNvPr id="85" name="直接箭头连接符 84">
-              <a:extLst>
-                <a:ext uri="{FF2B5EF4-FFF2-40B4-BE49-F238E27FC236}">
-                  <a16:creationId xmlns:a16="http://schemas.microsoft.com/office/drawing/2014/main" id="{56603CC8-5927-0A57-4D59-60AFFDBFAEE9}"/>
-                </a:ext>
-              </a:extLst>
-            </p:cNvPr>
-            <p:cNvCxnSpPr/>
-            <p:nvPr/>
-          </p:nvCxnSpPr>
-          <p:spPr>
-            <a:xfrm flipV="1">
-              <a:off x="5376863" y="3209924"/>
-              <a:ext cx="0" cy="219075"/>
-            </a:xfrm>
-            <a:prstGeom prst="straightConnector1">
-              <a:avLst/>
-            </a:prstGeom>
-            <a:ln w="25400">
-              <a:solidFill>
-                <a:schemeClr val="tx1"/>
-              </a:solidFill>
-              <a:headEnd w="med" len="lg"/>
-              <a:tailEnd type="stealth" w="med" len="lg"/>
-            </a:ln>
-          </p:spPr>
-          <p:style>
-            <a:lnRef idx="1">
-              <a:schemeClr val="accent1"/>
-            </a:lnRef>
-            <a:fillRef idx="0">
-              <a:schemeClr val="accent1"/>
-            </a:fillRef>
-            <a:effectRef idx="0">
-              <a:schemeClr val="accent1"/>
-            </a:effectRef>
-            <a:fontRef idx="minor">
-              <a:schemeClr val="tx1"/>
-            </a:fontRef>
-          </p:style>
-        </p:cxnSp>
-      </p:grpSp>
-      <p:grpSp>
-        <p:nvGrpSpPr>
-          <p:cNvPr id="89" name="组合 88">
-            <a:extLst>
-              <a:ext uri="{FF2B5EF4-FFF2-40B4-BE49-F238E27FC236}">
-                <a16:creationId xmlns:a16="http://schemas.microsoft.com/office/drawing/2014/main" id="{A28282B1-DACA-57A6-D277-F851E7EF44F6}"/>
-              </a:ext>
-            </a:extLst>
-          </p:cNvPr>
-          <p:cNvGrpSpPr/>
-          <p:nvPr/>
-        </p:nvGrpSpPr>
-        <p:grpSpPr>
-          <a:xfrm>
-            <a:off x="2497932" y="3209921"/>
-            <a:ext cx="7197000" cy="798207"/>
-            <a:chOff x="2497932" y="3209921"/>
-            <a:chExt cx="7197000" cy="798208"/>
-          </a:xfrm>
-        </p:grpSpPr>
-        <p:grpSp>
-          <p:nvGrpSpPr>
-            <p:cNvPr id="90" name="组合 89">
-              <a:extLst>
-                <a:ext uri="{FF2B5EF4-FFF2-40B4-BE49-F238E27FC236}">
-                  <a16:creationId xmlns:a16="http://schemas.microsoft.com/office/drawing/2014/main" id="{814A423F-F808-8039-4038-67CEE5857E28}"/>
-                </a:ext>
-              </a:extLst>
-            </p:cNvPr>
-            <p:cNvGrpSpPr/>
-            <p:nvPr/>
-          </p:nvGrpSpPr>
-          <p:grpSpPr>
-            <a:xfrm>
-              <a:off x="2497932" y="3209921"/>
-              <a:ext cx="7197000" cy="798208"/>
-              <a:chOff x="2497932" y="3209921"/>
-              <a:chExt cx="7197000" cy="798208"/>
-            </a:xfrm>
-          </p:grpSpPr>
-          <p:cxnSp>
-            <p:nvCxnSpPr>
-              <p:cNvPr id="92" name="直接连接符 91">
-                <a:extLst>
-                  <a:ext uri="{FF2B5EF4-FFF2-40B4-BE49-F238E27FC236}">
-                    <a16:creationId xmlns:a16="http://schemas.microsoft.com/office/drawing/2014/main" id="{42DB044E-76C3-5245-BC9E-C13DE21C40D7}"/>
-                  </a:ext>
-                </a:extLst>
-              </p:cNvPr>
-              <p:cNvCxnSpPr/>
-              <p:nvPr/>
-            </p:nvCxnSpPr>
-            <p:spPr>
-              <a:xfrm>
-                <a:off x="2497932" y="3209924"/>
-                <a:ext cx="0" cy="798205"/>
-              </a:xfrm>
-              <a:prstGeom prst="line">
-                <a:avLst/>
-              </a:prstGeom>
-              <a:ln w="25400">
-                <a:solidFill>
-                  <a:schemeClr val="tx1"/>
+                  <a:schemeClr val="bg1"/>
                 </a:solidFill>
               </a:ln>
             </p:spPr>
             <p:style>
-              <a:lnRef idx="1">
-                <a:schemeClr val="accent1"/>
+              <a:lnRef idx="2">
+                <a:schemeClr val="dk1"/>
               </a:lnRef>
-              <a:fillRef idx="0">
-                <a:schemeClr val="accent1"/>
+              <a:fillRef idx="1">
+                <a:schemeClr val="lt1"/>
               </a:fillRef>
               <a:effectRef idx="0">
-                <a:schemeClr val="accent1"/>
+                <a:schemeClr val="dk1"/>
               </a:effectRef>
               <a:fontRef idx="minor">
-                <a:schemeClr val="tx1"/>
+                <a:schemeClr val="dk1"/>
               </a:fontRef>
             </p:style>
-          </p:cxnSp>
-          <p:cxnSp>
-            <p:nvCxnSpPr>
-              <p:cNvPr id="93" name="直接连接符 92">
+            <p:txBody>
+              <a:bodyPr rtlCol="0" anchor="ctr"/>
+              <a:lstStyle/>
+              <a:p>
+                <a:pPr algn="ctr"/>
+                <a:r>
+                  <a:rPr lang="zh-CN" altLang="en-US" sz="1799" b="1" dirty="0">
+                    <a:latin typeface="宋体" panose="02010600030101010101" pitchFamily="2" charset="-122"/>
+                    <a:ea typeface="宋体" panose="02010600030101010101" pitchFamily="2" charset="-122"/>
+                    <a:cs typeface="Times New Roman" panose="02020603050405020304" pitchFamily="18" charset="0"/>
+                  </a:rPr>
+                  <a:t>确定性估计模型</a:t>
+                </a:r>
+              </a:p>
+            </p:txBody>
+          </p:sp>
+          <p:sp>
+            <p:nvSpPr>
+              <p:cNvPr id="75" name="矩形: 圆角 74">
                 <a:extLst>
                   <a:ext uri="{FF2B5EF4-FFF2-40B4-BE49-F238E27FC236}">
-                    <a16:creationId xmlns:a16="http://schemas.microsoft.com/office/drawing/2014/main" id="{57565AC7-9F62-FF54-B232-EFD15F0E8AEA}"/>
+                    <a16:creationId xmlns:a16="http://schemas.microsoft.com/office/drawing/2014/main" id="{A93DC2A5-6A36-A712-D950-9287398C87C7}"/>
                   </a:ext>
                 </a:extLst>
               </p:cNvPr>
-              <p:cNvCxnSpPr/>
+              <p:cNvSpPr/>
               <p:nvPr/>
-            </p:nvCxnSpPr>
+            </p:nvSpPr>
             <p:spPr>
               <a:xfrm>
-                <a:off x="9694932" y="3209921"/>
-                <a:ext cx="0" cy="798205"/>
+                <a:off x="4750918" y="555479"/>
+                <a:ext cx="2690165" cy="361950"/>
               </a:xfrm>
-              <a:prstGeom prst="line">
+              <a:prstGeom prst="roundRect">
                 <a:avLst/>
               </a:prstGeom>
-              <a:ln w="25400">
+              <a:ln>
                 <a:solidFill>
-                  <a:schemeClr val="tx1"/>
-                </a:solidFill>
-                <a:headEnd type="stealth" w="med" len="lg"/>
-                <a:tailEnd type="none" w="med" len="lg"/>
-              </a:ln>
-            </p:spPr>
-            <p:style>
-              <a:lnRef idx="1">
-                <a:schemeClr val="accent1"/>
-              </a:lnRef>
-              <a:fillRef idx="0">
-                <a:schemeClr val="accent1"/>
-              </a:fillRef>
-              <a:effectRef idx="0">
-                <a:schemeClr val="accent1"/>
-              </a:effectRef>
-              <a:fontRef idx="minor">
-                <a:schemeClr val="tx1"/>
-              </a:fontRef>
-            </p:style>
-          </p:cxnSp>
-          <p:cxnSp>
-            <p:nvCxnSpPr>
-              <p:cNvPr id="94" name="直接连接符 93">
-                <a:extLst>
-                  <a:ext uri="{FF2B5EF4-FFF2-40B4-BE49-F238E27FC236}">
-                    <a16:creationId xmlns:a16="http://schemas.microsoft.com/office/drawing/2014/main" id="{894478BE-D3F9-1458-F0D3-D22122E2BCED}"/>
-                  </a:ext>
-                </a:extLst>
-              </p:cNvPr>
-              <p:cNvCxnSpPr>
-                <a:cxnSpLocks/>
-              </p:cNvCxnSpPr>
-              <p:nvPr/>
-            </p:nvCxnSpPr>
-            <p:spPr>
-              <a:xfrm flipH="1">
-                <a:off x="6092886" y="3500438"/>
-                <a:ext cx="3114" cy="507689"/>
-              </a:xfrm>
-              <a:prstGeom prst="line">
-                <a:avLst/>
-              </a:prstGeom>
-              <a:ln w="25400">
-                <a:solidFill>
-                  <a:schemeClr val="tx1"/>
+                  <a:schemeClr val="bg1"/>
                 </a:solidFill>
               </a:ln>
             </p:spPr>
             <p:style>
-              <a:lnRef idx="1">
-                <a:schemeClr val="accent1"/>
+              <a:lnRef idx="2">
+                <a:schemeClr val="dk1"/>
               </a:lnRef>
-              <a:fillRef idx="0">
-                <a:schemeClr val="accent1"/>
+              <a:fillRef idx="1">
+                <a:schemeClr val="lt1"/>
               </a:fillRef>
               <a:effectRef idx="0">
-                <a:schemeClr val="accent1"/>
+                <a:schemeClr val="dk1"/>
               </a:effectRef>
               <a:fontRef idx="minor">
-                <a:schemeClr val="tx1"/>
+                <a:schemeClr val="dk1"/>
               </a:fontRef>
             </p:style>
-          </p:cxnSp>
+            <p:txBody>
+              <a:bodyPr rtlCol="0" anchor="ctr"/>
+              <a:lstStyle/>
+              <a:p>
+                <a:pPr algn="ctr"/>
+                <a:r>
+                  <a:rPr lang="zh-CN" altLang="en-US" sz="1799" b="1" dirty="0">
+                    <a:latin typeface="宋体" panose="02010600030101010101" pitchFamily="2" charset="-122"/>
+                    <a:ea typeface="宋体" panose="02010600030101010101" pitchFamily="2" charset="-122"/>
+                    <a:cs typeface="Times New Roman" panose="02020603050405020304" pitchFamily="18" charset="0"/>
+                  </a:rPr>
+                  <a:t>未校准的模型</a:t>
+                </a:r>
+              </a:p>
+            </p:txBody>
+          </p:sp>
+          <p:sp>
+            <p:nvSpPr>
+              <p:cNvPr id="76" name="矩形: 圆角 75">
+                <a:extLst>
+                  <a:ext uri="{FF2B5EF4-FFF2-40B4-BE49-F238E27FC236}">
+                    <a16:creationId xmlns:a16="http://schemas.microsoft.com/office/drawing/2014/main" id="{2C4E04AB-4998-C523-46DC-04C8945504C0}"/>
+                  </a:ext>
+                </a:extLst>
+              </p:cNvPr>
+              <p:cNvSpPr/>
+              <p:nvPr/>
+            </p:nvSpPr>
+            <p:spPr>
+              <a:xfrm>
+                <a:off x="7470141" y="555479"/>
+                <a:ext cx="2690165" cy="361950"/>
+              </a:xfrm>
+              <a:prstGeom prst="roundRect">
+                <a:avLst/>
+              </a:prstGeom>
+              <a:ln>
+                <a:solidFill>
+                  <a:schemeClr val="bg1"/>
+                </a:solidFill>
+              </a:ln>
+            </p:spPr>
+            <p:style>
+              <a:lnRef idx="2">
+                <a:schemeClr val="dk1"/>
+              </a:lnRef>
+              <a:fillRef idx="1">
+                <a:schemeClr val="lt1"/>
+              </a:fillRef>
+              <a:effectRef idx="0">
+                <a:schemeClr val="dk1"/>
+              </a:effectRef>
+              <a:fontRef idx="minor">
+                <a:schemeClr val="dk1"/>
+              </a:fontRef>
+            </p:style>
+            <p:txBody>
+              <a:bodyPr rtlCol="0" anchor="ctr"/>
+              <a:lstStyle/>
+              <a:p>
+                <a:pPr algn="ctr"/>
+                <a:r>
+                  <a:rPr lang="zh-CN" altLang="en-US" sz="1799" b="1" dirty="0">
+                    <a:latin typeface="宋体" panose="02010600030101010101" pitchFamily="2" charset="-122"/>
+                    <a:ea typeface="宋体" panose="02010600030101010101" pitchFamily="2" charset="-122"/>
+                    <a:cs typeface="Times New Roman" panose="02020603050405020304" pitchFamily="18" charset="0"/>
+                  </a:rPr>
+                  <a:t>可信估计模型</a:t>
+                </a:r>
+              </a:p>
+            </p:txBody>
+          </p:sp>
+          <p:sp>
+            <p:nvSpPr>
+              <p:cNvPr id="77" name="矩形: 圆角 76">
+                <a:extLst>
+                  <a:ext uri="{FF2B5EF4-FFF2-40B4-BE49-F238E27FC236}">
+                    <a16:creationId xmlns:a16="http://schemas.microsoft.com/office/drawing/2014/main" id="{A20F148F-CB99-1C56-723C-3D9DA4685932}"/>
+                  </a:ext>
+                </a:extLst>
+              </p:cNvPr>
+              <p:cNvSpPr/>
+              <p:nvPr/>
+            </p:nvSpPr>
+            <p:spPr>
+              <a:xfrm>
+                <a:off x="3368394" y="3494427"/>
+                <a:ext cx="2576282" cy="361951"/>
+              </a:xfrm>
+              <a:prstGeom prst="roundRect">
+                <a:avLst/>
+              </a:prstGeom>
+              <a:ln>
+                <a:solidFill>
+                  <a:schemeClr val="bg1"/>
+                </a:solidFill>
+              </a:ln>
+            </p:spPr>
+            <p:style>
+              <a:lnRef idx="2">
+                <a:schemeClr val="dk1"/>
+              </a:lnRef>
+              <a:fillRef idx="1">
+                <a:schemeClr val="lt1"/>
+              </a:fillRef>
+              <a:effectRef idx="0">
+                <a:schemeClr val="dk1"/>
+              </a:effectRef>
+              <a:fontRef idx="minor">
+                <a:schemeClr val="dk1"/>
+              </a:fontRef>
+            </p:style>
+            <p:txBody>
+              <a:bodyPr rtlCol="0" anchor="ctr"/>
+              <a:lstStyle/>
+              <a:p>
+                <a:pPr algn="ctr"/>
+                <a:r>
+                  <a:rPr lang="zh-CN" altLang="en-US" b="1" dirty="0">
+                    <a:latin typeface="宋体" panose="02010600030101010101" pitchFamily="2" charset="-122"/>
+                    <a:ea typeface="宋体" panose="02010600030101010101" pitchFamily="2" charset="-122"/>
+                    <a:cs typeface="Times New Roman" panose="02020603050405020304" pitchFamily="18" charset="0"/>
+                  </a:rPr>
+                  <a:t>不确定性量化</a:t>
+                </a:r>
+                <a:endParaRPr lang="en-US" altLang="zh-CN" b="1" dirty="0">
+                  <a:latin typeface="宋体" panose="02010600030101010101" pitchFamily="2" charset="-122"/>
+                  <a:ea typeface="宋体" panose="02010600030101010101" pitchFamily="2" charset="-122"/>
+                  <a:cs typeface="Times New Roman" panose="02020603050405020304" pitchFamily="18" charset="0"/>
+                </a:endParaRPr>
+              </a:p>
+            </p:txBody>
+          </p:sp>
+          <p:grpSp>
+            <p:nvGrpSpPr>
+              <p:cNvPr id="78" name="组合 77">
+                <a:extLst>
+                  <a:ext uri="{FF2B5EF4-FFF2-40B4-BE49-F238E27FC236}">
+                    <a16:creationId xmlns:a16="http://schemas.microsoft.com/office/drawing/2014/main" id="{75FD147A-7DE1-CB94-014A-96E386F71D52}"/>
+                  </a:ext>
+                </a:extLst>
+              </p:cNvPr>
+              <p:cNvGrpSpPr/>
+              <p:nvPr/>
+            </p:nvGrpSpPr>
+            <p:grpSpPr>
+              <a:xfrm>
+                <a:off x="3936207" y="3209925"/>
+                <a:ext cx="1440656" cy="219076"/>
+                <a:chOff x="3936206" y="3209924"/>
+                <a:chExt cx="1440657" cy="219076"/>
+              </a:xfrm>
+            </p:grpSpPr>
+            <p:grpSp>
+              <p:nvGrpSpPr>
+                <p:cNvPr id="79" name="组合 78">
+                  <a:extLst>
+                    <a:ext uri="{FF2B5EF4-FFF2-40B4-BE49-F238E27FC236}">
+                      <a16:creationId xmlns:a16="http://schemas.microsoft.com/office/drawing/2014/main" id="{F7596B0C-AF72-7DCC-2C3B-4F713DC63764}"/>
+                    </a:ext>
+                  </a:extLst>
+                </p:cNvPr>
+                <p:cNvGrpSpPr/>
+                <p:nvPr/>
+              </p:nvGrpSpPr>
+              <p:grpSpPr>
+                <a:xfrm>
+                  <a:off x="3936206" y="3209925"/>
+                  <a:ext cx="1440657" cy="219075"/>
+                  <a:chOff x="3936206" y="3209925"/>
+                  <a:chExt cx="1440657" cy="219075"/>
+                </a:xfrm>
+              </p:grpSpPr>
+              <p:cxnSp>
+                <p:nvCxnSpPr>
+                  <p:cNvPr id="81" name="直接连接符 80">
+                    <a:extLst>
+                      <a:ext uri="{FF2B5EF4-FFF2-40B4-BE49-F238E27FC236}">
+                        <a16:creationId xmlns:a16="http://schemas.microsoft.com/office/drawing/2014/main" id="{8E789C5D-55D1-5E38-82D3-C2FA010DC99D}"/>
+                      </a:ext>
+                    </a:extLst>
+                  </p:cNvPr>
+                  <p:cNvCxnSpPr/>
+                  <p:nvPr/>
+                </p:nvCxnSpPr>
+                <p:spPr>
+                  <a:xfrm>
+                    <a:off x="3936206" y="3209925"/>
+                    <a:ext cx="0" cy="219075"/>
+                  </a:xfrm>
+                  <a:prstGeom prst="line">
+                    <a:avLst/>
+                  </a:prstGeom>
+                  <a:ln w="25400">
+                    <a:solidFill>
+                      <a:schemeClr val="tx1"/>
+                    </a:solidFill>
+                    <a:headEnd w="med" len="lg"/>
+                    <a:tailEnd w="med" len="lg"/>
+                  </a:ln>
+                </p:spPr>
+                <p:style>
+                  <a:lnRef idx="1">
+                    <a:schemeClr val="accent1"/>
+                  </a:lnRef>
+                  <a:fillRef idx="0">
+                    <a:schemeClr val="accent1"/>
+                  </a:fillRef>
+                  <a:effectRef idx="0">
+                    <a:schemeClr val="accent1"/>
+                  </a:effectRef>
+                  <a:fontRef idx="minor">
+                    <a:schemeClr val="tx1"/>
+                  </a:fontRef>
+                </p:style>
+              </p:cxnSp>
+              <p:cxnSp>
+                <p:nvCxnSpPr>
+                  <p:cNvPr id="82" name="直接连接符 81">
+                    <a:extLst>
+                      <a:ext uri="{FF2B5EF4-FFF2-40B4-BE49-F238E27FC236}">
+                        <a16:creationId xmlns:a16="http://schemas.microsoft.com/office/drawing/2014/main" id="{93724F56-673F-C571-0D26-5174BE7A7161}"/>
+                      </a:ext>
+                    </a:extLst>
+                  </p:cNvPr>
+                  <p:cNvCxnSpPr>
+                    <a:cxnSpLocks/>
+                  </p:cNvCxnSpPr>
+                  <p:nvPr/>
+                </p:nvCxnSpPr>
+                <p:spPr>
+                  <a:xfrm>
+                    <a:off x="3936206" y="3429000"/>
+                    <a:ext cx="1440657" cy="0"/>
+                  </a:xfrm>
+                  <a:prstGeom prst="line">
+                    <a:avLst/>
+                  </a:prstGeom>
+                  <a:ln w="25400">
+                    <a:solidFill>
+                      <a:schemeClr val="tx1"/>
+                    </a:solidFill>
+                    <a:headEnd w="med" len="lg"/>
+                    <a:tailEnd w="med" len="lg"/>
+                  </a:ln>
+                </p:spPr>
+                <p:style>
+                  <a:lnRef idx="1">
+                    <a:schemeClr val="accent1"/>
+                  </a:lnRef>
+                  <a:fillRef idx="0">
+                    <a:schemeClr val="accent1"/>
+                  </a:fillRef>
+                  <a:effectRef idx="0">
+                    <a:schemeClr val="accent1"/>
+                  </a:effectRef>
+                  <a:fontRef idx="minor">
+                    <a:schemeClr val="tx1"/>
+                  </a:fontRef>
+                </p:style>
+              </p:cxnSp>
+            </p:grpSp>
+            <p:cxnSp>
+              <p:nvCxnSpPr>
+                <p:cNvPr id="80" name="直接箭头连接符 79">
+                  <a:extLst>
+                    <a:ext uri="{FF2B5EF4-FFF2-40B4-BE49-F238E27FC236}">
+                      <a16:creationId xmlns:a16="http://schemas.microsoft.com/office/drawing/2014/main" id="{ACEEE113-3216-92C1-7BA1-BEED6A22B337}"/>
+                    </a:ext>
+                  </a:extLst>
+                </p:cNvPr>
+                <p:cNvCxnSpPr/>
+                <p:nvPr/>
+              </p:nvCxnSpPr>
+              <p:spPr>
+                <a:xfrm flipV="1">
+                  <a:off x="5376863" y="3209924"/>
+                  <a:ext cx="0" cy="219075"/>
+                </a:xfrm>
+                <a:prstGeom prst="straightConnector1">
+                  <a:avLst/>
+                </a:prstGeom>
+                <a:ln w="25400">
+                  <a:solidFill>
+                    <a:schemeClr val="tx1"/>
+                  </a:solidFill>
+                  <a:headEnd w="med" len="lg"/>
+                  <a:tailEnd type="stealth" w="med" len="lg"/>
+                </a:ln>
+              </p:spPr>
+              <p:style>
+                <a:lnRef idx="1">
+                  <a:schemeClr val="accent1"/>
+                </a:lnRef>
+                <a:fillRef idx="0">
+                  <a:schemeClr val="accent1"/>
+                </a:fillRef>
+                <a:effectRef idx="0">
+                  <a:schemeClr val="accent1"/>
+                </a:effectRef>
+                <a:fontRef idx="minor">
+                  <a:schemeClr val="tx1"/>
+                </a:fontRef>
+              </p:style>
+            </p:cxnSp>
+          </p:grpSp>
+          <p:grpSp>
+            <p:nvGrpSpPr>
+              <p:cNvPr id="83" name="组合 82">
+                <a:extLst>
+                  <a:ext uri="{FF2B5EF4-FFF2-40B4-BE49-F238E27FC236}">
+                    <a16:creationId xmlns:a16="http://schemas.microsoft.com/office/drawing/2014/main" id="{7FDFFD86-429B-9F39-CBBE-7830E32819EB}"/>
+                  </a:ext>
+                </a:extLst>
+              </p:cNvPr>
+              <p:cNvGrpSpPr/>
+              <p:nvPr/>
+            </p:nvGrpSpPr>
+            <p:grpSpPr>
+              <a:xfrm>
+                <a:off x="6819901" y="3226109"/>
+                <a:ext cx="1440656" cy="219076"/>
+                <a:chOff x="3936206" y="3209924"/>
+                <a:chExt cx="1440657" cy="219076"/>
+              </a:xfrm>
+            </p:grpSpPr>
+            <p:grpSp>
+              <p:nvGrpSpPr>
+                <p:cNvPr id="84" name="组合 83">
+                  <a:extLst>
+                    <a:ext uri="{FF2B5EF4-FFF2-40B4-BE49-F238E27FC236}">
+                      <a16:creationId xmlns:a16="http://schemas.microsoft.com/office/drawing/2014/main" id="{E8691973-0582-DD63-90BA-81B6DA559F50}"/>
+                    </a:ext>
+                  </a:extLst>
+                </p:cNvPr>
+                <p:cNvGrpSpPr/>
+                <p:nvPr/>
+              </p:nvGrpSpPr>
+              <p:grpSpPr>
+                <a:xfrm>
+                  <a:off x="3936206" y="3209925"/>
+                  <a:ext cx="1440657" cy="219075"/>
+                  <a:chOff x="3936206" y="3209925"/>
+                  <a:chExt cx="1440657" cy="219075"/>
+                </a:xfrm>
+              </p:grpSpPr>
+              <p:cxnSp>
+                <p:nvCxnSpPr>
+                  <p:cNvPr id="86" name="直接连接符 85">
+                    <a:extLst>
+                      <a:ext uri="{FF2B5EF4-FFF2-40B4-BE49-F238E27FC236}">
+                        <a16:creationId xmlns:a16="http://schemas.microsoft.com/office/drawing/2014/main" id="{6F0D3EEB-A815-B44B-B6AB-5E853AFC969F}"/>
+                      </a:ext>
+                    </a:extLst>
+                  </p:cNvPr>
+                  <p:cNvCxnSpPr/>
+                  <p:nvPr/>
+                </p:nvCxnSpPr>
+                <p:spPr>
+                  <a:xfrm>
+                    <a:off x="3936206" y="3209925"/>
+                    <a:ext cx="0" cy="219075"/>
+                  </a:xfrm>
+                  <a:prstGeom prst="line">
+                    <a:avLst/>
+                  </a:prstGeom>
+                  <a:ln w="25400">
+                    <a:solidFill>
+                      <a:schemeClr val="tx1"/>
+                    </a:solidFill>
+                    <a:headEnd w="med" len="lg"/>
+                    <a:tailEnd w="med" len="lg"/>
+                  </a:ln>
+                </p:spPr>
+                <p:style>
+                  <a:lnRef idx="1">
+                    <a:schemeClr val="accent1"/>
+                  </a:lnRef>
+                  <a:fillRef idx="0">
+                    <a:schemeClr val="accent1"/>
+                  </a:fillRef>
+                  <a:effectRef idx="0">
+                    <a:schemeClr val="accent1"/>
+                  </a:effectRef>
+                  <a:fontRef idx="minor">
+                    <a:schemeClr val="tx1"/>
+                  </a:fontRef>
+                </p:style>
+              </p:cxnSp>
+              <p:cxnSp>
+                <p:nvCxnSpPr>
+                  <p:cNvPr id="87" name="直接连接符 86">
+                    <a:extLst>
+                      <a:ext uri="{FF2B5EF4-FFF2-40B4-BE49-F238E27FC236}">
+                        <a16:creationId xmlns:a16="http://schemas.microsoft.com/office/drawing/2014/main" id="{28513ED4-07CE-9933-FAFC-3B12B78FDEB1}"/>
+                      </a:ext>
+                    </a:extLst>
+                  </p:cNvPr>
+                  <p:cNvCxnSpPr>
+                    <a:cxnSpLocks/>
+                  </p:cNvCxnSpPr>
+                  <p:nvPr/>
+                </p:nvCxnSpPr>
+                <p:spPr>
+                  <a:xfrm>
+                    <a:off x="3936206" y="3429000"/>
+                    <a:ext cx="1440657" cy="0"/>
+                  </a:xfrm>
+                  <a:prstGeom prst="line">
+                    <a:avLst/>
+                  </a:prstGeom>
+                  <a:ln w="25400">
+                    <a:solidFill>
+                      <a:schemeClr val="tx1"/>
+                    </a:solidFill>
+                    <a:headEnd w="med" len="lg"/>
+                    <a:tailEnd w="med" len="lg"/>
+                  </a:ln>
+                </p:spPr>
+                <p:style>
+                  <a:lnRef idx="1">
+                    <a:schemeClr val="accent1"/>
+                  </a:lnRef>
+                  <a:fillRef idx="0">
+                    <a:schemeClr val="accent1"/>
+                  </a:fillRef>
+                  <a:effectRef idx="0">
+                    <a:schemeClr val="accent1"/>
+                  </a:effectRef>
+                  <a:fontRef idx="minor">
+                    <a:schemeClr val="tx1"/>
+                  </a:fontRef>
+                </p:style>
+              </p:cxnSp>
+            </p:grpSp>
+            <p:cxnSp>
+              <p:nvCxnSpPr>
+                <p:cNvPr id="85" name="直接箭头连接符 84">
+                  <a:extLst>
+                    <a:ext uri="{FF2B5EF4-FFF2-40B4-BE49-F238E27FC236}">
+                      <a16:creationId xmlns:a16="http://schemas.microsoft.com/office/drawing/2014/main" id="{56603CC8-5927-0A57-4D59-60AFFDBFAEE9}"/>
+                    </a:ext>
+                  </a:extLst>
+                </p:cNvPr>
+                <p:cNvCxnSpPr/>
+                <p:nvPr/>
+              </p:nvCxnSpPr>
+              <p:spPr>
+                <a:xfrm flipV="1">
+                  <a:off x="5376863" y="3209924"/>
+                  <a:ext cx="0" cy="219075"/>
+                </a:xfrm>
+                <a:prstGeom prst="straightConnector1">
+                  <a:avLst/>
+                </a:prstGeom>
+                <a:ln w="25400">
+                  <a:solidFill>
+                    <a:schemeClr val="tx1"/>
+                  </a:solidFill>
+                  <a:headEnd w="med" len="lg"/>
+                  <a:tailEnd type="stealth" w="med" len="lg"/>
+                </a:ln>
+              </p:spPr>
+              <p:style>
+                <a:lnRef idx="1">
+                  <a:schemeClr val="accent1"/>
+                </a:lnRef>
+                <a:fillRef idx="0">
+                  <a:schemeClr val="accent1"/>
+                </a:fillRef>
+                <a:effectRef idx="0">
+                  <a:schemeClr val="accent1"/>
+                </a:effectRef>
+                <a:fontRef idx="minor">
+                  <a:schemeClr val="tx1"/>
+                </a:fontRef>
+              </p:style>
+            </p:cxnSp>
+          </p:grpSp>
+          <p:grpSp>
+            <p:nvGrpSpPr>
+              <p:cNvPr id="89" name="组合 88">
+                <a:extLst>
+                  <a:ext uri="{FF2B5EF4-FFF2-40B4-BE49-F238E27FC236}">
+                    <a16:creationId xmlns:a16="http://schemas.microsoft.com/office/drawing/2014/main" id="{A28282B1-DACA-57A6-D277-F851E7EF44F6}"/>
+                  </a:ext>
+                </a:extLst>
+              </p:cNvPr>
+              <p:cNvGrpSpPr/>
+              <p:nvPr/>
+            </p:nvGrpSpPr>
+            <p:grpSpPr>
+              <a:xfrm>
+                <a:off x="2497932" y="3209921"/>
+                <a:ext cx="7197000" cy="798207"/>
+                <a:chOff x="2497932" y="3209921"/>
+                <a:chExt cx="7197000" cy="798208"/>
+              </a:xfrm>
+            </p:grpSpPr>
+            <p:grpSp>
+              <p:nvGrpSpPr>
+                <p:cNvPr id="90" name="组合 89">
+                  <a:extLst>
+                    <a:ext uri="{FF2B5EF4-FFF2-40B4-BE49-F238E27FC236}">
+                      <a16:creationId xmlns:a16="http://schemas.microsoft.com/office/drawing/2014/main" id="{814A423F-F808-8039-4038-67CEE5857E28}"/>
+                    </a:ext>
+                  </a:extLst>
+                </p:cNvPr>
+                <p:cNvGrpSpPr/>
+                <p:nvPr/>
+              </p:nvGrpSpPr>
+              <p:grpSpPr>
+                <a:xfrm>
+                  <a:off x="2497932" y="3209921"/>
+                  <a:ext cx="7197000" cy="798208"/>
+                  <a:chOff x="2497932" y="3209921"/>
+                  <a:chExt cx="7197000" cy="798208"/>
+                </a:xfrm>
+              </p:grpSpPr>
+              <p:cxnSp>
+                <p:nvCxnSpPr>
+                  <p:cNvPr id="92" name="直接连接符 91">
+                    <a:extLst>
+                      <a:ext uri="{FF2B5EF4-FFF2-40B4-BE49-F238E27FC236}">
+                        <a16:creationId xmlns:a16="http://schemas.microsoft.com/office/drawing/2014/main" id="{42DB044E-76C3-5245-BC9E-C13DE21C40D7}"/>
+                      </a:ext>
+                    </a:extLst>
+                  </p:cNvPr>
+                  <p:cNvCxnSpPr/>
+                  <p:nvPr/>
+                </p:nvCxnSpPr>
+                <p:spPr>
+                  <a:xfrm>
+                    <a:off x="2497932" y="3209924"/>
+                    <a:ext cx="0" cy="798205"/>
+                  </a:xfrm>
+                  <a:prstGeom prst="line">
+                    <a:avLst/>
+                  </a:prstGeom>
+                  <a:ln w="25400">
+                    <a:solidFill>
+                      <a:schemeClr val="tx1"/>
+                    </a:solidFill>
+                  </a:ln>
+                </p:spPr>
+                <p:style>
+                  <a:lnRef idx="1">
+                    <a:schemeClr val="accent1"/>
+                  </a:lnRef>
+                  <a:fillRef idx="0">
+                    <a:schemeClr val="accent1"/>
+                  </a:fillRef>
+                  <a:effectRef idx="0">
+                    <a:schemeClr val="accent1"/>
+                  </a:effectRef>
+                  <a:fontRef idx="minor">
+                    <a:schemeClr val="tx1"/>
+                  </a:fontRef>
+                </p:style>
+              </p:cxnSp>
+              <p:cxnSp>
+                <p:nvCxnSpPr>
+                  <p:cNvPr id="93" name="直接连接符 92">
+                    <a:extLst>
+                      <a:ext uri="{FF2B5EF4-FFF2-40B4-BE49-F238E27FC236}">
+                        <a16:creationId xmlns:a16="http://schemas.microsoft.com/office/drawing/2014/main" id="{57565AC7-9F62-FF54-B232-EFD15F0E8AEA}"/>
+                      </a:ext>
+                    </a:extLst>
+                  </p:cNvPr>
+                  <p:cNvCxnSpPr/>
+                  <p:nvPr/>
+                </p:nvCxnSpPr>
+                <p:spPr>
+                  <a:xfrm>
+                    <a:off x="9694932" y="3209921"/>
+                    <a:ext cx="0" cy="798205"/>
+                  </a:xfrm>
+                  <a:prstGeom prst="line">
+                    <a:avLst/>
+                  </a:prstGeom>
+                  <a:ln w="25400">
+                    <a:solidFill>
+                      <a:schemeClr val="tx1"/>
+                    </a:solidFill>
+                    <a:headEnd type="stealth" w="med" len="lg"/>
+                    <a:tailEnd type="none" w="med" len="lg"/>
+                  </a:ln>
+                </p:spPr>
+                <p:style>
+                  <a:lnRef idx="1">
+                    <a:schemeClr val="accent1"/>
+                  </a:lnRef>
+                  <a:fillRef idx="0">
+                    <a:schemeClr val="accent1"/>
+                  </a:fillRef>
+                  <a:effectRef idx="0">
+                    <a:schemeClr val="accent1"/>
+                  </a:effectRef>
+                  <a:fontRef idx="minor">
+                    <a:schemeClr val="tx1"/>
+                  </a:fontRef>
+                </p:style>
+              </p:cxnSp>
+              <p:cxnSp>
+                <p:nvCxnSpPr>
+                  <p:cNvPr id="94" name="直接连接符 93">
+                    <a:extLst>
+                      <a:ext uri="{FF2B5EF4-FFF2-40B4-BE49-F238E27FC236}">
+                        <a16:creationId xmlns:a16="http://schemas.microsoft.com/office/drawing/2014/main" id="{894478BE-D3F9-1458-F0D3-D22122E2BCED}"/>
+                      </a:ext>
+                    </a:extLst>
+                  </p:cNvPr>
+                  <p:cNvCxnSpPr>
+                    <a:cxnSpLocks/>
+                  </p:cNvCxnSpPr>
+                  <p:nvPr/>
+                </p:nvCxnSpPr>
+                <p:spPr>
+                  <a:xfrm flipH="1">
+                    <a:off x="6092886" y="3500438"/>
+                    <a:ext cx="3114" cy="507689"/>
+                  </a:xfrm>
+                  <a:prstGeom prst="line">
+                    <a:avLst/>
+                  </a:prstGeom>
+                  <a:ln w="25400">
+                    <a:solidFill>
+                      <a:schemeClr val="tx1"/>
+                    </a:solidFill>
+                  </a:ln>
+                </p:spPr>
+                <p:style>
+                  <a:lnRef idx="1">
+                    <a:schemeClr val="accent1"/>
+                  </a:lnRef>
+                  <a:fillRef idx="0">
+                    <a:schemeClr val="accent1"/>
+                  </a:fillRef>
+                  <a:effectRef idx="0">
+                    <a:schemeClr val="accent1"/>
+                  </a:effectRef>
+                  <a:fontRef idx="minor">
+                    <a:schemeClr val="tx1"/>
+                  </a:fontRef>
+                </p:style>
+              </p:cxnSp>
+            </p:grpSp>
+            <p:cxnSp>
+              <p:nvCxnSpPr>
+                <p:cNvPr id="91" name="直接连接符 90">
+                  <a:extLst>
+                    <a:ext uri="{FF2B5EF4-FFF2-40B4-BE49-F238E27FC236}">
+                      <a16:creationId xmlns:a16="http://schemas.microsoft.com/office/drawing/2014/main" id="{C4817C0C-34DA-787C-B612-9F74BAADE823}"/>
+                    </a:ext>
+                  </a:extLst>
+                </p:cNvPr>
+                <p:cNvCxnSpPr/>
+                <p:nvPr/>
+              </p:nvCxnSpPr>
+              <p:spPr>
+                <a:xfrm>
+                  <a:off x="2497932" y="4008126"/>
+                  <a:ext cx="7197000" cy="0"/>
+                </a:xfrm>
+                <a:prstGeom prst="line">
+                  <a:avLst/>
+                </a:prstGeom>
+                <a:ln w="25400">
+                  <a:solidFill>
+                    <a:schemeClr val="tx1"/>
+                  </a:solidFill>
+                </a:ln>
+              </p:spPr>
+              <p:style>
+                <a:lnRef idx="1">
+                  <a:schemeClr val="accent1"/>
+                </a:lnRef>
+                <a:fillRef idx="0">
+                  <a:schemeClr val="accent1"/>
+                </a:fillRef>
+                <a:effectRef idx="0">
+                  <a:schemeClr val="accent1"/>
+                </a:effectRef>
+                <a:fontRef idx="minor">
+                  <a:schemeClr val="tx1"/>
+                </a:fontRef>
+              </p:style>
+            </p:cxnSp>
+          </p:grpSp>
+          <p:sp>
+            <p:nvSpPr>
+              <p:cNvPr id="97" name="文本框 96">
+                <a:extLst>
+                  <a:ext uri="{FF2B5EF4-FFF2-40B4-BE49-F238E27FC236}">
+                    <a16:creationId xmlns:a16="http://schemas.microsoft.com/office/drawing/2014/main" id="{5F376DB0-0C9C-0B5E-9C6E-026DD07EFEEE}"/>
+                  </a:ext>
+                </a:extLst>
+              </p:cNvPr>
+              <p:cNvSpPr txBox="1"/>
+              <p:nvPr/>
+            </p:nvSpPr>
+            <p:spPr>
+              <a:xfrm>
+                <a:off x="3152824" y="3104867"/>
+                <a:ext cx="380444" cy="400110"/>
+              </a:xfrm>
+              <a:prstGeom prst="rect">
+                <a:avLst/>
+              </a:prstGeom>
+              <a:noFill/>
+            </p:spPr>
+            <p:txBody>
+              <a:bodyPr wrap="square" rtlCol="0">
+                <a:spAutoFit/>
+              </a:bodyPr>
+              <a:lstStyle/>
+              <a:p>
+                <a:r>
+                  <a:rPr lang="en-US" altLang="zh-CN" sz="2000" dirty="0">
+                    <a:latin typeface="Times New Roman" panose="02020603050405020304" pitchFamily="18" charset="0"/>
+                    <a:cs typeface="Times New Roman" panose="02020603050405020304" pitchFamily="18" charset="0"/>
+                  </a:rPr>
+                  <a:t>(a)</a:t>
+                </a:r>
+                <a:endParaRPr lang="zh-CN" altLang="en-US" sz="2000" dirty="0">
+                  <a:latin typeface="Times New Roman" panose="02020603050405020304" pitchFamily="18" charset="0"/>
+                  <a:cs typeface="Times New Roman" panose="02020603050405020304" pitchFamily="18" charset="0"/>
+                </a:endParaRPr>
+              </a:p>
+            </p:txBody>
+          </p:sp>
+          <p:sp>
+            <p:nvSpPr>
+              <p:cNvPr id="98" name="文本框 97">
+                <a:extLst>
+                  <a:ext uri="{FF2B5EF4-FFF2-40B4-BE49-F238E27FC236}">
+                    <a16:creationId xmlns:a16="http://schemas.microsoft.com/office/drawing/2014/main" id="{6D5716D6-A550-FF9F-63C9-299C4D874083}"/>
+                  </a:ext>
+                </a:extLst>
+              </p:cNvPr>
+              <p:cNvSpPr txBox="1"/>
+              <p:nvPr/>
+            </p:nvSpPr>
+            <p:spPr>
+              <a:xfrm>
+                <a:off x="8600955" y="3106742"/>
+                <a:ext cx="380444" cy="400110"/>
+              </a:xfrm>
+              <a:prstGeom prst="rect">
+                <a:avLst/>
+              </a:prstGeom>
+              <a:noFill/>
+            </p:spPr>
+            <p:txBody>
+              <a:bodyPr wrap="square" rtlCol="0">
+                <a:spAutoFit/>
+              </a:bodyPr>
+              <a:lstStyle/>
+              <a:p>
+                <a:r>
+                  <a:rPr lang="en-US" altLang="zh-CN" sz="2000" dirty="0">
+                    <a:latin typeface="Times New Roman" panose="02020603050405020304" pitchFamily="18" charset="0"/>
+                    <a:cs typeface="Times New Roman" panose="02020603050405020304" pitchFamily="18" charset="0"/>
+                  </a:rPr>
+                  <a:t>(c)</a:t>
+                </a:r>
+                <a:endParaRPr lang="zh-CN" altLang="en-US" sz="2000" dirty="0">
+                  <a:latin typeface="Times New Roman" panose="02020603050405020304" pitchFamily="18" charset="0"/>
+                  <a:cs typeface="Times New Roman" panose="02020603050405020304" pitchFamily="18" charset="0"/>
+                </a:endParaRPr>
+              </a:p>
+            </p:txBody>
+          </p:sp>
+          <p:sp>
+            <p:nvSpPr>
+              <p:cNvPr id="2" name="文本框 1">
+                <a:extLst>
+                  <a:ext uri="{FF2B5EF4-FFF2-40B4-BE49-F238E27FC236}">
+                    <a16:creationId xmlns:a16="http://schemas.microsoft.com/office/drawing/2014/main" id="{61DF417E-D17F-18A7-9DF1-394C81490F89}"/>
+                  </a:ext>
+                </a:extLst>
+              </p:cNvPr>
+              <p:cNvSpPr txBox="1"/>
+              <p:nvPr/>
+            </p:nvSpPr>
+            <p:spPr>
+              <a:xfrm>
+                <a:off x="5880077" y="3104076"/>
+                <a:ext cx="495336" cy="400110"/>
+              </a:xfrm>
+              <a:prstGeom prst="rect">
+                <a:avLst/>
+              </a:prstGeom>
+              <a:noFill/>
+            </p:spPr>
+            <p:txBody>
+              <a:bodyPr wrap="square" rtlCol="0">
+                <a:spAutoFit/>
+              </a:bodyPr>
+              <a:lstStyle/>
+              <a:p>
+                <a:r>
+                  <a:rPr lang="en-US" altLang="zh-CN" sz="2000" dirty="0">
+                    <a:latin typeface="Times New Roman" panose="02020603050405020304" pitchFamily="18" charset="0"/>
+                    <a:cs typeface="Times New Roman" panose="02020603050405020304" pitchFamily="18" charset="0"/>
+                  </a:rPr>
+                  <a:t>(b)</a:t>
+                </a:r>
+                <a:endParaRPr lang="zh-CN" altLang="en-US" sz="2000" dirty="0">
+                  <a:latin typeface="Times New Roman" panose="02020603050405020304" pitchFamily="18" charset="0"/>
+                  <a:cs typeface="Times New Roman" panose="02020603050405020304" pitchFamily="18" charset="0"/>
+                </a:endParaRPr>
+              </a:p>
+            </p:txBody>
+          </p:sp>
+          <p:sp>
+            <p:nvSpPr>
+              <p:cNvPr id="3" name="矩形: 圆角 2">
+                <a:extLst>
+                  <a:ext uri="{FF2B5EF4-FFF2-40B4-BE49-F238E27FC236}">
+                    <a16:creationId xmlns:a16="http://schemas.microsoft.com/office/drawing/2014/main" id="{97009897-8F60-6E3A-6752-44BF6410296E}"/>
+                  </a:ext>
+                </a:extLst>
+              </p:cNvPr>
+              <p:cNvSpPr/>
+              <p:nvPr/>
+            </p:nvSpPr>
+            <p:spPr>
+              <a:xfrm>
+                <a:off x="6252088" y="3491421"/>
+                <a:ext cx="2576282" cy="361951"/>
+              </a:xfrm>
+              <a:prstGeom prst="roundRect">
+                <a:avLst/>
+              </a:prstGeom>
+              <a:ln>
+                <a:solidFill>
+                  <a:schemeClr val="bg1"/>
+                </a:solidFill>
+              </a:ln>
+            </p:spPr>
+            <p:style>
+              <a:lnRef idx="2">
+                <a:schemeClr val="dk1"/>
+              </a:lnRef>
+              <a:fillRef idx="1">
+                <a:schemeClr val="lt1"/>
+              </a:fillRef>
+              <a:effectRef idx="0">
+                <a:schemeClr val="dk1"/>
+              </a:effectRef>
+              <a:fontRef idx="minor">
+                <a:schemeClr val="dk1"/>
+              </a:fontRef>
+            </p:style>
+            <p:txBody>
+              <a:bodyPr rtlCol="0" anchor="ctr"/>
+              <a:lstStyle/>
+              <a:p>
+                <a:pPr algn="ctr"/>
+                <a:r>
+                  <a:rPr lang="zh-CN" altLang="en-US" b="1" dirty="0">
+                    <a:latin typeface="宋体" panose="02010600030101010101" pitchFamily="2" charset="-122"/>
+                    <a:ea typeface="宋体" panose="02010600030101010101" pitchFamily="2" charset="-122"/>
+                    <a:cs typeface="Times New Roman" panose="02020603050405020304" pitchFamily="18" charset="0"/>
+                  </a:rPr>
+                  <a:t>不确定性校准</a:t>
+                </a:r>
+                <a:endParaRPr lang="en-US" altLang="zh-CN" b="1" dirty="0">
+                  <a:latin typeface="宋体" panose="02010600030101010101" pitchFamily="2" charset="-122"/>
+                  <a:ea typeface="宋体" panose="02010600030101010101" pitchFamily="2" charset="-122"/>
+                  <a:cs typeface="Times New Roman" panose="02020603050405020304" pitchFamily="18" charset="0"/>
+                </a:endParaRPr>
+              </a:p>
+            </p:txBody>
+          </p:sp>
         </p:grpSp>
-        <p:cxnSp>
-          <p:nvCxnSpPr>
-            <p:cNvPr id="91" name="直接连接符 90">
-              <a:extLst>
-                <a:ext uri="{FF2B5EF4-FFF2-40B4-BE49-F238E27FC236}">
-                  <a16:creationId xmlns:a16="http://schemas.microsoft.com/office/drawing/2014/main" id="{C4817C0C-34DA-787C-B612-9F74BAADE823}"/>
-                </a:ext>
-              </a:extLst>
-            </p:cNvPr>
-            <p:cNvCxnSpPr/>
-            <p:nvPr/>
-          </p:nvCxnSpPr>
-          <p:spPr>
-            <a:xfrm>
-              <a:off x="2497932" y="4008126"/>
-              <a:ext cx="7197000" cy="0"/>
-            </a:xfrm>
-            <a:prstGeom prst="line">
-              <a:avLst/>
-            </a:prstGeom>
-            <a:ln w="25400">
-              <a:solidFill>
-                <a:schemeClr val="tx1"/>
-              </a:solidFill>
-            </a:ln>
-          </p:spPr>
-          <p:style>
-            <a:lnRef idx="1">
-              <a:schemeClr val="accent1"/>
-            </a:lnRef>
-            <a:fillRef idx="0">
-              <a:schemeClr val="accent1"/>
-            </a:fillRef>
-            <a:effectRef idx="0">
-              <a:schemeClr val="accent1"/>
-            </a:effectRef>
-            <a:fontRef idx="minor">
-              <a:schemeClr val="tx1"/>
-            </a:fontRef>
-          </p:style>
-        </p:cxnSp>
       </p:grpSp>
-      <p:sp>
-        <p:nvSpPr>
-          <p:cNvPr id="95" name="矩形: 圆角 94">
-            <a:extLst>
-              <a:ext uri="{FF2B5EF4-FFF2-40B4-BE49-F238E27FC236}">
-                <a16:creationId xmlns:a16="http://schemas.microsoft.com/office/drawing/2014/main" id="{6841919D-1644-1A13-DF46-E50183154D5D}"/>
-              </a:ext>
-            </a:extLst>
-          </p:cNvPr>
-          <p:cNvSpPr/>
-          <p:nvPr/>
-        </p:nvSpPr>
-        <p:spPr>
-          <a:xfrm>
-            <a:off x="1666078" y="4115308"/>
-            <a:ext cx="8853616" cy="361951"/>
-          </a:xfrm>
-          <a:prstGeom prst="roundRect">
-            <a:avLst/>
-          </a:prstGeom>
-          <a:ln>
-            <a:solidFill>
-              <a:schemeClr val="bg1"/>
-            </a:solidFill>
-          </a:ln>
-        </p:spPr>
-        <p:style>
-          <a:lnRef idx="2">
-            <a:schemeClr val="dk1"/>
-          </a:lnRef>
-          <a:fillRef idx="1">
-            <a:schemeClr val="lt1"/>
-          </a:fillRef>
-          <a:effectRef idx="0">
-            <a:schemeClr val="dk1"/>
-          </a:effectRef>
-          <a:fontRef idx="minor">
-            <a:schemeClr val="dk1"/>
-          </a:fontRef>
-        </p:style>
-        <p:txBody>
-          <a:bodyPr rtlCol="0" anchor="ctr"/>
-          <a:lstStyle/>
-          <a:p>
-            <a:pPr algn="ctr"/>
-            <a:r>
-              <a:rPr lang="en-US" altLang="zh-CN" dirty="0">
-                <a:latin typeface="Times New Roman" panose="02020603050405020304" pitchFamily="18" charset="0"/>
-                <a:cs typeface="Times New Roman" panose="02020603050405020304" pitchFamily="18" charset="0"/>
-              </a:rPr>
-              <a:t>extraction of spatial-temporal dependencies of sparsely-distributed degradation characteristics</a:t>
-            </a:r>
-            <a:endParaRPr lang="zh-CN" altLang="en-US" dirty="0">
-              <a:latin typeface="Times New Roman" panose="02020603050405020304" pitchFamily="18" charset="0"/>
-              <a:cs typeface="Times New Roman" panose="02020603050405020304" pitchFamily="18" charset="0"/>
-            </a:endParaRPr>
-          </a:p>
-        </p:txBody>
-      </p:sp>
-      <p:sp>
-        <p:nvSpPr>
-          <p:cNvPr id="97" name="文本框 96">
-            <a:extLst>
-              <a:ext uri="{FF2B5EF4-FFF2-40B4-BE49-F238E27FC236}">
-                <a16:creationId xmlns:a16="http://schemas.microsoft.com/office/drawing/2014/main" id="{5F376DB0-0C9C-0B5E-9C6E-026DD07EFEEE}"/>
-              </a:ext>
-            </a:extLst>
-          </p:cNvPr>
-          <p:cNvSpPr txBox="1"/>
-          <p:nvPr/>
-        </p:nvSpPr>
-        <p:spPr>
-          <a:xfrm>
-            <a:off x="3152824" y="3104867"/>
-            <a:ext cx="380444" cy="400110"/>
-          </a:xfrm>
-          <a:prstGeom prst="rect">
-            <a:avLst/>
-          </a:prstGeom>
-          <a:noFill/>
-        </p:spPr>
-        <p:txBody>
-          <a:bodyPr wrap="square" rtlCol="0">
-            <a:spAutoFit/>
-          </a:bodyPr>
-          <a:lstStyle/>
-          <a:p>
-            <a:r>
-              <a:rPr lang="en-US" altLang="zh-CN" sz="2000" dirty="0">
-                <a:latin typeface="Times New Roman" panose="02020603050405020304" pitchFamily="18" charset="0"/>
-                <a:cs typeface="Times New Roman" panose="02020603050405020304" pitchFamily="18" charset="0"/>
-              </a:rPr>
-              <a:t>(a)</a:t>
-            </a:r>
-            <a:endParaRPr lang="zh-CN" altLang="en-US" sz="2000" dirty="0">
-              <a:latin typeface="Times New Roman" panose="02020603050405020304" pitchFamily="18" charset="0"/>
-              <a:cs typeface="Times New Roman" panose="02020603050405020304" pitchFamily="18" charset="0"/>
-            </a:endParaRPr>
-          </a:p>
-        </p:txBody>
-      </p:sp>
-      <p:sp>
-        <p:nvSpPr>
-          <p:cNvPr id="98" name="文本框 97">
-            <a:extLst>
-              <a:ext uri="{FF2B5EF4-FFF2-40B4-BE49-F238E27FC236}">
-                <a16:creationId xmlns:a16="http://schemas.microsoft.com/office/drawing/2014/main" id="{6D5716D6-A550-FF9F-63C9-299C4D874083}"/>
-              </a:ext>
-            </a:extLst>
-          </p:cNvPr>
-          <p:cNvSpPr txBox="1"/>
-          <p:nvPr/>
-        </p:nvSpPr>
-        <p:spPr>
-          <a:xfrm>
-            <a:off x="8600955" y="3106742"/>
-            <a:ext cx="380444" cy="400110"/>
-          </a:xfrm>
-          <a:prstGeom prst="rect">
-            <a:avLst/>
-          </a:prstGeom>
-          <a:noFill/>
-        </p:spPr>
-        <p:txBody>
-          <a:bodyPr wrap="square" rtlCol="0">
-            <a:spAutoFit/>
-          </a:bodyPr>
-          <a:lstStyle/>
-          <a:p>
-            <a:r>
-              <a:rPr lang="en-US" altLang="zh-CN" sz="2000" dirty="0">
-                <a:latin typeface="Times New Roman" panose="02020603050405020304" pitchFamily="18" charset="0"/>
-                <a:cs typeface="Times New Roman" panose="02020603050405020304" pitchFamily="18" charset="0"/>
-              </a:rPr>
-              <a:t>(c)</a:t>
-            </a:r>
-            <a:endParaRPr lang="zh-CN" altLang="en-US" sz="2000" dirty="0">
-              <a:latin typeface="Times New Roman" panose="02020603050405020304" pitchFamily="18" charset="0"/>
-              <a:cs typeface="Times New Roman" panose="02020603050405020304" pitchFamily="18" charset="0"/>
-            </a:endParaRPr>
-          </a:p>
-        </p:txBody>
-      </p:sp>
-      <p:sp>
-        <p:nvSpPr>
-          <p:cNvPr id="2" name="文本框 1">
-            <a:extLst>
-              <a:ext uri="{FF2B5EF4-FFF2-40B4-BE49-F238E27FC236}">
-                <a16:creationId xmlns:a16="http://schemas.microsoft.com/office/drawing/2014/main" id="{61DF417E-D17F-18A7-9DF1-394C81490F89}"/>
-              </a:ext>
-            </a:extLst>
-          </p:cNvPr>
-          <p:cNvSpPr txBox="1"/>
-          <p:nvPr/>
-        </p:nvSpPr>
-        <p:spPr>
-          <a:xfrm>
-            <a:off x="5880077" y="3104076"/>
-            <a:ext cx="495336" cy="400110"/>
-          </a:xfrm>
-          <a:prstGeom prst="rect">
-            <a:avLst/>
-          </a:prstGeom>
-          <a:noFill/>
-        </p:spPr>
-        <p:txBody>
-          <a:bodyPr wrap="square" rtlCol="0">
-            <a:spAutoFit/>
-          </a:bodyPr>
-          <a:lstStyle/>
-          <a:p>
-            <a:r>
-              <a:rPr lang="en-US" altLang="zh-CN" sz="2000" dirty="0">
-                <a:latin typeface="Times New Roman" panose="02020603050405020304" pitchFamily="18" charset="0"/>
-                <a:cs typeface="Times New Roman" panose="02020603050405020304" pitchFamily="18" charset="0"/>
-              </a:rPr>
-              <a:t>(b)</a:t>
-            </a:r>
-            <a:endParaRPr lang="zh-CN" altLang="en-US" sz="2000" dirty="0">
-              <a:latin typeface="Times New Roman" panose="02020603050405020304" pitchFamily="18" charset="0"/>
-              <a:cs typeface="Times New Roman" panose="02020603050405020304" pitchFamily="18" charset="0"/>
-            </a:endParaRPr>
-          </a:p>
-        </p:txBody>
-      </p:sp>
-      <p:sp>
-        <p:nvSpPr>
-          <p:cNvPr id="3" name="矩形: 圆角 2">
-            <a:extLst>
-              <a:ext uri="{FF2B5EF4-FFF2-40B4-BE49-F238E27FC236}">
-                <a16:creationId xmlns:a16="http://schemas.microsoft.com/office/drawing/2014/main" id="{97009897-8F60-6E3A-6752-44BF6410296E}"/>
-              </a:ext>
-            </a:extLst>
-          </p:cNvPr>
-          <p:cNvSpPr/>
-          <p:nvPr/>
-        </p:nvSpPr>
-        <p:spPr>
-          <a:xfrm>
-            <a:off x="6252088" y="3491421"/>
-            <a:ext cx="2576282" cy="361951"/>
-          </a:xfrm>
-          <a:prstGeom prst="roundRect">
-            <a:avLst/>
-          </a:prstGeom>
-          <a:ln>
-            <a:solidFill>
-              <a:schemeClr val="bg1"/>
-            </a:solidFill>
-          </a:ln>
-        </p:spPr>
-        <p:style>
-          <a:lnRef idx="2">
-            <a:schemeClr val="dk1"/>
-          </a:lnRef>
-          <a:fillRef idx="1">
-            <a:schemeClr val="lt1"/>
-          </a:fillRef>
-          <a:effectRef idx="0">
-            <a:schemeClr val="dk1"/>
-          </a:effectRef>
-          <a:fontRef idx="minor">
-            <a:schemeClr val="dk1"/>
-          </a:fontRef>
-        </p:style>
-        <p:txBody>
-          <a:bodyPr rtlCol="0" anchor="ctr"/>
-          <a:lstStyle/>
-          <a:p>
-            <a:pPr algn="ctr"/>
-            <a:r>
-              <a:rPr lang="en-US" altLang="zh-CN" dirty="0">
-                <a:latin typeface="Times New Roman" panose="02020603050405020304" pitchFamily="18" charset="0"/>
-                <a:cs typeface="Times New Roman" panose="02020603050405020304" pitchFamily="18" charset="0"/>
-              </a:rPr>
-              <a:t>uncertainty calibration</a:t>
-            </a:r>
-          </a:p>
-        </p:txBody>
-      </p:sp>
     </p:spTree>
     <p:extLst>
       <p:ext uri="{BB962C8B-B14F-4D97-AF65-F5344CB8AC3E}">
